--- a/courses/build/teach-the-teachers/T-D5.pptx
+++ b/courses/build/teach-the-teachers/T-D5.pptx
@@ -4680,7 +4680,7 @@
     <p:bg>
       <p:bgPr>
         <a:solidFill>
-          <a:srgbClr val="1F4D2B"/>
+          <a:srgbClr val="2F3A33"/>
         </a:solidFill>
         <a:effectLst/>
       </p:bgPr>
@@ -4722,9 +4722,9 @@
             <a:r>
               <a:rPr sz="1000" b="0">
                 <a:solidFill>
-                  <a:srgbClr val="A8D88A"/>
-                </a:solidFill>
-                <a:latin typeface="Arial"/>
+                  <a:srgbClr val="F2EFE6"/>
+                </a:solidFill>
+                <a:latin typeface="Trebuchet MS"/>
               </a:rPr>
               <a:t>T-D5-01   ·   Poster T-P21</a:t>
             </a:r>
@@ -4761,9 +4761,9 @@
             <a:r>
               <a:rPr sz="1000" b="0">
                 <a:solidFill>
-                  <a:srgbClr val="A8D88A"/>
-                </a:solidFill>
-                <a:latin typeface="Arial"/>
+                  <a:srgbClr val="F2EFE6"/>
+                </a:solidFill>
+                <a:latin typeface="Trebuchet MS"/>
               </a:rPr>
               <a:t>Teach the Teachers</a:t>
             </a:r>
@@ -4800,9 +4800,9 @@
             <a:r>
               <a:rPr sz="4800" b="1">
                 <a:solidFill>
-                  <a:srgbClr val="F7F2E9"/>
-                </a:solidFill>
-                <a:latin typeface="Georgia"/>
+                  <a:srgbClr val="F2EFE6"/>
+                </a:solidFill>
+                <a:latin typeface="Segoe Print"/>
               </a:rPr>
               <a:t>Day 5</a:t>
             </a:r>
@@ -4824,7 +4824,7 @@
             <a:avLst/>
           </a:prstGeom>
           <a:solidFill>
-            <a:srgbClr val="C07A1E"/>
+            <a:srgbClr val="D2452C"/>
           </a:solidFill>
           <a:ln>
             <a:noFill/>
@@ -4883,9 +4883,9 @@
             <a:r>
               <a:rPr sz="2400" b="0">
                 <a:solidFill>
-                  <a:srgbClr val="A8D88A"/>
-                </a:solidFill>
-                <a:latin typeface="Arial"/>
+                  <a:srgbClr val="F2EFE6"/>
+                </a:solidFill>
+                <a:latin typeface="Trebuchet MS"/>
               </a:rPr>
               <a:t>Ready to teach</a:t>
             </a:r>
@@ -4899,9 +4899,9 @@
             <a:r>
               <a:rPr sz="2400" b="0">
                 <a:solidFill>
-                  <a:srgbClr val="A8D88A"/>
-                </a:solidFill>
-                <a:latin typeface="Arial"/>
+                  <a:srgbClr val="F2EFE6"/>
+                </a:solidFill>
+                <a:latin typeface="Trebuchet MS"/>
               </a:rPr>
               <a:t>Day 5 of 5</a:t>
             </a:r>
@@ -4923,11 +4923,11 @@
             <a:avLst/>
           </a:prstGeom>
           <a:solidFill>
-            <a:srgbClr val="FBF6EC"/>
+            <a:srgbClr val="C9A77C"/>
           </a:solidFill>
           <a:ln w="15875">
             <a:solidFill>
-              <a:srgbClr val="E2D8C4"/>
+              <a:srgbClr val="2C6FB7"/>
             </a:solidFill>
           </a:ln>
           <a:effectLst/>
@@ -4984,9 +4984,9 @@
             <a:r>
               <a:rPr sz="1200" b="1">
                 <a:solidFill>
-                  <a:srgbClr val="C07A1E"/>
-                </a:solidFill>
-                <a:latin typeface="Arial"/>
+                  <a:srgbClr val="D2452C"/>
+                </a:solidFill>
+                <a:latin typeface="Trebuchet MS"/>
               </a:rPr>
               <a:t>POSTER ART · T-P21-ART · coming</a:t>
             </a:r>
@@ -5023,9 +5023,9 @@
             <a:r>
               <a:rPr sz="1800" b="1">
                 <a:solidFill>
-                  <a:srgbClr val="1F4D2B"/>
-                </a:solidFill>
-                <a:latin typeface="Georgia"/>
+                  <a:srgbClr val="1C1C1C"/>
+                </a:solidFill>
+                <a:latin typeface="Segoe Print"/>
               </a:rPr>
               <a:t>Artwork for T-P21 · Test it side by side</a:t>
             </a:r>
@@ -5062,9 +5062,9 @@
             <a:r>
               <a:rPr sz="1100" b="0">
                 <a:solidFill>
-                  <a:srgbClr val="20190F"/>
-                </a:solidFill>
-                <a:latin typeface="Arial"/>
+                  <a:srgbClr val="1C1C1C"/>
+                </a:solidFill>
+                <a:latin typeface="Trebuchet MS"/>
               </a:rPr>
               <a:t>Two small plots side by side, divided by a string line. Left plot: bare soil, small pale plants. Right plot: mulched soil with compost, taller dark-green plants. A group of five farmers crouches between them: one measures a plant against a marked stick, one draws on a clipboard, one holds a handful of soil from each side, two discuss, pointing. Along the…</a:t>
             </a:r>
@@ -5085,7 +5085,7 @@
     <p:bg>
       <p:bgPr>
         <a:solidFill>
-          <a:srgbClr val="F7F2E9"/>
+          <a:srgbClr val="C9A77C"/>
         </a:solidFill>
         <a:effectLst/>
       </p:bgPr>
@@ -5127,9 +5127,9 @@
             <a:r>
               <a:rPr sz="1000" b="0">
                 <a:solidFill>
-                  <a:srgbClr val="6B6255"/>
-                </a:solidFill>
-                <a:latin typeface="Arial"/>
+                  <a:srgbClr val="1C1C1C"/>
+                </a:solidFill>
+                <a:latin typeface="Trebuchet MS"/>
               </a:rPr>
               <a:t>T-D5-10   ·   Poster T-P15</a:t>
             </a:r>
@@ -5166,9 +5166,9 @@
             <a:r>
               <a:rPr sz="1000" b="0">
                 <a:solidFill>
-                  <a:srgbClr val="6B6255"/>
-                </a:solidFill>
-                <a:latin typeface="Arial"/>
+                  <a:srgbClr val="1C1C1C"/>
+                </a:solidFill>
+                <a:latin typeface="Trebuchet MS"/>
               </a:rPr>
               <a:t>Teach the Teachers</a:t>
             </a:r>
@@ -5205,9 +5205,9 @@
             <a:r>
               <a:rPr sz="3800" b="1">
                 <a:solidFill>
-                  <a:srgbClr val="1F4D2B"/>
-                </a:solidFill>
-                <a:latin typeface="Georgia"/>
+                  <a:srgbClr val="1C1C1C"/>
+                </a:solidFill>
+                <a:latin typeface="Segoe Print"/>
               </a:rPr>
               <a:t>Three ways to check</a:t>
             </a:r>
@@ -5229,7 +5229,7 @@
             <a:avLst/>
           </a:prstGeom>
           <a:solidFill>
-            <a:srgbClr val="E2D8C4"/>
+            <a:srgbClr val="2C6FB7"/>
           </a:solidFill>
           <a:ln>
             <a:noFill/>
@@ -5288,9 +5288,9 @@
             <a:r>
               <a:rPr sz="2800" b="0">
                 <a:solidFill>
-                  <a:srgbClr val="20190F"/>
-                </a:solidFill>
-                <a:latin typeface="Arial"/>
+                  <a:srgbClr val="1C1C1C"/>
+                </a:solidFill>
+                <a:latin typeface="Trebuchet MS"/>
               </a:rPr>
               <a:t>•  Watch them do it</a:t>
             </a:r>
@@ -5304,9 +5304,9 @@
             <a:r>
               <a:rPr sz="2800" b="0">
                 <a:solidFill>
-                  <a:srgbClr val="20190F"/>
-                </a:solidFill>
-                <a:latin typeface="Arial"/>
+                  <a:srgbClr val="1C1C1C"/>
+                </a:solidFill>
+                <a:latin typeface="Trebuchet MS"/>
               </a:rPr>
               <a:t>•  Picture quiz, Day 1 and Day 5</a:t>
             </a:r>
@@ -5320,9 +5320,9 @@
             <a:r>
               <a:rPr sz="2800" b="0">
                 <a:solidFill>
-                  <a:srgbClr val="20190F"/>
-                </a:solidFill>
-                <a:latin typeface="Arial"/>
+                  <a:srgbClr val="1C1C1C"/>
+                </a:solidFill>
+                <a:latin typeface="Trebuchet MS"/>
               </a:rPr>
               <a:t>•  Ask them: fingers and stickers</a:t>
             </a:r>
@@ -5344,11 +5344,11 @@
             <a:avLst/>
           </a:prstGeom>
           <a:solidFill>
-            <a:srgbClr val="FBF6EC"/>
+            <a:srgbClr val="C9A77C"/>
           </a:solidFill>
           <a:ln w="15875">
             <a:solidFill>
-              <a:srgbClr val="E2D8C4"/>
+              <a:srgbClr val="2C6FB7"/>
             </a:solidFill>
           </a:ln>
           <a:effectLst/>
@@ -5405,9 +5405,9 @@
             <a:r>
               <a:rPr sz="1200" b="1">
                 <a:solidFill>
-                  <a:srgbClr val="C07A1E"/>
-                </a:solidFill>
-                <a:latin typeface="Arial"/>
+                  <a:srgbClr val="D2452C"/>
+                </a:solidFill>
+                <a:latin typeface="Trebuchet MS"/>
               </a:rPr>
               <a:t>POSTER ART · T-P15-ART · coming</a:t>
             </a:r>
@@ -5444,9 +5444,9 @@
             <a:r>
               <a:rPr sz="1800" b="1">
                 <a:solidFill>
-                  <a:srgbClr val="1F4D2B"/>
-                </a:solidFill>
-                <a:latin typeface="Georgia"/>
+                  <a:srgbClr val="1C1C1C"/>
+                </a:solidFill>
+                <a:latin typeface="Segoe Print"/>
               </a:rPr>
               <a:t>Artwork for T-P15 · Did they learn it?</a:t>
             </a:r>
@@ -5483,9 +5483,9 @@
             <a:r>
               <a:rPr sz="1100" b="0">
                 <a:solidFill>
-                  <a:srgbClr val="20190F"/>
-                </a:solidFill>
-                <a:latin typeface="Arial"/>
+                  <a:srgbClr val="1C1C1C"/>
+                </a:solidFill>
+                <a:latin typeface="Trebuchet MS"/>
               </a:rPr>
               <a:t>Three stacked scenes. ① A co-facilitator with a clipboard watches a farmer adjust the string on an A-frame; on the clipboard three simple symbols: a tick, a half circle, a cross. ② A room with three corners, each with a large picture card on the wall (a sun low, a mulched bed, a bare bed); learners walk to the corners. ③ A group holds up fingers (one to…</a:t>
             </a:r>
@@ -5506,7 +5506,7 @@
     <p:bg>
       <p:bgPr>
         <a:solidFill>
-          <a:srgbClr val="F7F2E9"/>
+          <a:srgbClr val="C9A77C"/>
         </a:solidFill>
         <a:effectLst/>
       </p:bgPr>
@@ -5548,9 +5548,9 @@
             <a:r>
               <a:rPr sz="1000" b="0">
                 <a:solidFill>
-                  <a:srgbClr val="6B6255"/>
-                </a:solidFill>
-                <a:latin typeface="Arial"/>
+                  <a:srgbClr val="1C1C1C"/>
+                </a:solidFill>
+                <a:latin typeface="Trebuchet MS"/>
               </a:rPr>
               <a:t>T-D5-11   ·   Poster T-P16</a:t>
             </a:r>
@@ -5587,9 +5587,9 @@
             <a:r>
               <a:rPr sz="1000" b="0">
                 <a:solidFill>
-                  <a:srgbClr val="6B6255"/>
-                </a:solidFill>
-                <a:latin typeface="Arial"/>
+                  <a:srgbClr val="1C1C1C"/>
+                </a:solidFill>
+                <a:latin typeface="Trebuchet MS"/>
               </a:rPr>
               <a:t>Teach the Teachers</a:t>
             </a:r>
@@ -5611,7 +5611,7 @@
             <a:avLst/>
           </a:prstGeom>
           <a:solidFill>
-            <a:srgbClr val="C07A1E"/>
+            <a:srgbClr val="D2452C"/>
           </a:solidFill>
           <a:ln>
             <a:noFill/>
@@ -5670,9 +5670,9 @@
             <a:r>
               <a:rPr sz="1400" b="1">
                 <a:solidFill>
-                  <a:srgbClr val="F7F2E9"/>
-                </a:solidFill>
-                <a:latin typeface="Arial"/>
+                  <a:srgbClr val="C9A77C"/>
+                </a:solidFill>
+                <a:latin typeface="Trebuchet MS"/>
               </a:rPr>
               <a:t>YOUR TURN</a:t>
             </a:r>
@@ -5709,9 +5709,9 @@
             <a:r>
               <a:rPr sz="3800" b="1">
                 <a:solidFill>
-                  <a:srgbClr val="1F4D2B"/>
-                </a:solidFill>
-                <a:latin typeface="Georgia"/>
+                  <a:srgbClr val="1C1C1C"/>
+                </a:solidFill>
+                <a:latin typeface="Segoe Print"/>
               </a:rPr>
               <a:t>The flip folder</a:t>
             </a:r>
@@ -5733,7 +5733,7 @@
             <a:avLst/>
           </a:prstGeom>
           <a:solidFill>
-            <a:srgbClr val="E2D8C4"/>
+            <a:srgbClr val="2C6FB7"/>
           </a:solidFill>
           <a:ln>
             <a:noFill/>
@@ -5792,9 +5792,9 @@
             <a:r>
               <a:rPr sz="3000" b="1">
                 <a:solidFill>
-                  <a:srgbClr val="20190F"/>
-                </a:solidFill>
-                <a:latin typeface="Arial"/>
+                  <a:srgbClr val="1C1C1C"/>
+                </a:solidFill>
+                <a:latin typeface="Trebuchet MS"/>
               </a:rPr>
               <a:t>•  Eight forms, in order</a:t>
             </a:r>
@@ -5808,9 +5808,9 @@
             <a:r>
               <a:rPr sz="3000" b="1">
                 <a:solidFill>
-                  <a:srgbClr val="20190F"/>
-                </a:solidFill>
-                <a:latin typeface="Arial"/>
+                  <a:srgbClr val="1C1C1C"/>
+                </a:solidFill>
+                <a:latin typeface="Trebuchet MS"/>
               </a:rPr>
               <a:t>•  When is each one used?</a:t>
             </a:r>
@@ -5832,11 +5832,11 @@
             <a:avLst/>
           </a:prstGeom>
           <a:solidFill>
-            <a:srgbClr val="FBF6EC"/>
+            <a:srgbClr val="C9A77C"/>
           </a:solidFill>
           <a:ln w="15875">
             <a:solidFill>
-              <a:srgbClr val="E2D8C4"/>
+              <a:srgbClr val="2C6FB7"/>
             </a:solidFill>
           </a:ln>
           <a:effectLst/>
@@ -5893,9 +5893,9 @@
             <a:r>
               <a:rPr sz="1200" b="1">
                 <a:solidFill>
-                  <a:srgbClr val="C07A1E"/>
-                </a:solidFill>
-                <a:latin typeface="Arial"/>
+                  <a:srgbClr val="D2452C"/>
+                </a:solidFill>
+                <a:latin typeface="Trebuchet MS"/>
               </a:rPr>
               <a:t>POSTER ART · T-P16-ART · coming</a:t>
             </a:r>
@@ -5932,9 +5932,9 @@
             <a:r>
               <a:rPr sz="1800" b="1">
                 <a:solidFill>
-                  <a:srgbClr val="1F4D2B"/>
-                </a:solidFill>
-                <a:latin typeface="Georgia"/>
+                  <a:srgbClr val="1C1C1C"/>
+                </a:solidFill>
+                <a:latin typeface="Segoe Print"/>
               </a:rPr>
               <a:t>Artwork for T-P16 · Ready by Day 0 — the course kit</a:t>
             </a:r>
@@ -5971,9 +5971,9 @@
             <a:r>
               <a:rPr sz="1100" b="0">
                 <a:solidFill>
-                  <a:srgbClr val="20190F"/>
-                </a:solidFill>
-                <a:latin typeface="Arial"/>
+                  <a:srgbClr val="1C1C1C"/>
+                </a:solidFill>
+                <a:latin typeface="Trebuchet MS"/>
               </a:rPr>
               <a:t>A flat-lay seen from above on a green tarp: four crates, each with a different plant symbol drawn on it (bean, pumpkin, maize cob, marula fruit), holding spades, string, jars and tins; a poster tube; an open flip folder with forms (lines, not letters); a first aid kit with a cross symbol, open; a clipboard with a register grid; a stack of blank…</a:t>
             </a:r>
@@ -5994,7 +5994,7 @@
     <p:bg>
       <p:bgPr>
         <a:solidFill>
-          <a:srgbClr val="F7F2E9"/>
+          <a:srgbClr val="C9A77C"/>
         </a:solidFill>
         <a:effectLst/>
       </p:bgPr>
@@ -6036,9 +6036,9 @@
             <a:r>
               <a:rPr sz="1000" b="0">
                 <a:solidFill>
-                  <a:srgbClr val="6B6255"/>
-                </a:solidFill>
-                <a:latin typeface="Arial"/>
+                  <a:srgbClr val="1C1C1C"/>
+                </a:solidFill>
+                <a:latin typeface="Trebuchet MS"/>
               </a:rPr>
               <a:t>T-D5-12   ·   Poster T-P04</a:t>
             </a:r>
@@ -6075,9 +6075,9 @@
             <a:r>
               <a:rPr sz="1000" b="0">
                 <a:solidFill>
-                  <a:srgbClr val="6B6255"/>
-                </a:solidFill>
-                <a:latin typeface="Arial"/>
+                  <a:srgbClr val="1C1C1C"/>
+                </a:solidFill>
+                <a:latin typeface="Trebuchet MS"/>
               </a:rPr>
               <a:t>Teach the Teachers</a:t>
             </a:r>
@@ -6114,9 +6114,9 @@
             <a:r>
               <a:rPr sz="3800" b="1">
                 <a:solidFill>
-                  <a:srgbClr val="1F4D2B"/>
-                </a:solidFill>
-                <a:latin typeface="Georgia"/>
+                  <a:srgbClr val="1C1C1C"/>
+                </a:solidFill>
+                <a:latin typeface="Segoe Print"/>
               </a:rPr>
               <a:t>Look how far you came</a:t>
             </a:r>
@@ -6138,7 +6138,7 @@
             <a:avLst/>
           </a:prstGeom>
           <a:solidFill>
-            <a:srgbClr val="E2D8C4"/>
+            <a:srgbClr val="2C6FB7"/>
           </a:solidFill>
           <a:ln>
             <a:noFill/>
@@ -6197,9 +6197,9 @@
             <a:r>
               <a:rPr sz="2800" b="0">
                 <a:solidFill>
-                  <a:srgbClr val="20190F"/>
-                </a:solidFill>
-                <a:latin typeface="Arial"/>
+                  <a:srgbClr val="1C1C1C"/>
+                </a:solidFill>
+                <a:latin typeface="Trebuchet MS"/>
               </a:rPr>
               <a:t>•  Talk %: Round 2 to Round 5</a:t>
             </a:r>
@@ -6221,11 +6221,11 @@
             <a:avLst/>
           </a:prstGeom>
           <a:solidFill>
-            <a:srgbClr val="FBF6EC"/>
+            <a:srgbClr val="C9A77C"/>
           </a:solidFill>
           <a:ln w="15875">
             <a:solidFill>
-              <a:srgbClr val="E2D8C4"/>
+              <a:srgbClr val="2C6FB7"/>
             </a:solidFill>
           </a:ln>
           <a:effectLst/>
@@ -6282,9 +6282,9 @@
             <a:r>
               <a:rPr sz="1200" b="1">
                 <a:solidFill>
-                  <a:srgbClr val="C07A1E"/>
-                </a:solidFill>
-                <a:latin typeface="Arial"/>
+                  <a:srgbClr val="D2452C"/>
+                </a:solidFill>
+                <a:latin typeface="Trebuchet MS"/>
               </a:rPr>
               <a:t>POSTER ART · T-P04-ART · coming</a:t>
             </a:r>
@@ -6321,9 +6321,9 @@
             <a:r>
               <a:rPr sz="1800" b="1">
                 <a:solidFill>
-                  <a:srgbClr val="1F4D2B"/>
-                </a:solidFill>
-                <a:latin typeface="Georgia"/>
+                  <a:srgbClr val="1C1C1C"/>
+                </a:solidFill>
+                <a:latin typeface="Segoe Print"/>
               </a:rPr>
               <a:t>Artwork for T-P04 · The teacher-talk meter</a:t>
             </a:r>
@@ -6360,9 +6360,9 @@
             <a:r>
               <a:rPr sz="1100" b="0">
                 <a:solidFill>
-                  <a:srgbClr val="20190F"/>
-                </a:solidFill>
-                <a:latin typeface="Arial"/>
+                  <a:srgbClr val="1C1C1C"/>
+                </a:solidFill>
+                <a:latin typeface="Trebuchet MS"/>
               </a:rPr>
               <a:t>Top half: a big half-circle gauge, like a fuel gauge, split into ten equal wedges — three Ochre wedges on the left, seven Leaf-green wedges on the right (the Leaf wedges also carry small dot pattern so it works in black and white). A thick Ink needle points into the third Ochre wedge. Bottom half: a facilitator stands to one side with an open hand…</a:t>
             </a:r>
@@ -6383,7 +6383,7 @@
     <p:bg>
       <p:bgPr>
         <a:solidFill>
-          <a:srgbClr val="F7F2E9"/>
+          <a:srgbClr val="C9A77C"/>
         </a:solidFill>
         <a:effectLst/>
       </p:bgPr>
@@ -6425,9 +6425,9 @@
             <a:r>
               <a:rPr sz="1000" b="0">
                 <a:solidFill>
-                  <a:srgbClr val="6B6255"/>
-                </a:solidFill>
-                <a:latin typeface="Arial"/>
+                  <a:srgbClr val="1C1C1C"/>
+                </a:solidFill>
+                <a:latin typeface="Trebuchet MS"/>
               </a:rPr>
               <a:t>T-D5-13   ·   Poster T-P18</a:t>
             </a:r>
@@ -6464,9 +6464,9 @@
             <a:r>
               <a:rPr sz="1000" b="0">
                 <a:solidFill>
-                  <a:srgbClr val="6B6255"/>
-                </a:solidFill>
-                <a:latin typeface="Arial"/>
+                  <a:srgbClr val="1C1C1C"/>
+                </a:solidFill>
+                <a:latin typeface="Trebuchet MS"/>
               </a:rPr>
               <a:t>Teach the Teachers</a:t>
             </a:r>
@@ -6503,9 +6503,9 @@
             <a:r>
               <a:rPr sz="3800" b="1">
                 <a:solidFill>
-                  <a:srgbClr val="1F4D2B"/>
-                </a:solidFill>
-                <a:latin typeface="Georgia"/>
+                  <a:srgbClr val="1C1C1C"/>
+                </a:solidFill>
+                <a:latin typeface="Segoe Print"/>
               </a:rPr>
               <a:t>Keep the teacher strong</a:t>
             </a:r>
@@ -6527,7 +6527,7 @@
             <a:avLst/>
           </a:prstGeom>
           <a:solidFill>
-            <a:srgbClr val="E2D8C4"/>
+            <a:srgbClr val="2C6FB7"/>
           </a:solidFill>
           <a:ln>
             <a:noFill/>
@@ -6586,9 +6586,9 @@
             <a:r>
               <a:rPr sz="2400" b="0">
                 <a:solidFill>
-                  <a:srgbClr val="20190F"/>
-                </a:solidFill>
-                <a:latin typeface="Arial"/>
+                  <a:srgbClr val="1C1C1C"/>
+                </a:solidFill>
+                <a:latin typeface="Trebuchet MS"/>
               </a:rPr>
               <a:t>•  Three courses, then rest</a:t>
             </a:r>
@@ -6602,9 +6602,9 @@
             <a:r>
               <a:rPr sz="2400" b="0">
                 <a:solidFill>
-                  <a:srgbClr val="20190F"/>
-                </a:solidFill>
-                <a:latin typeface="Arial"/>
+                  <a:srgbClr val="1C1C1C"/>
+                </a:solidFill>
+                <a:latin typeface="Trebuchet MS"/>
               </a:rPr>
               <a:t>•  Day 0 always, save your voice</a:t>
             </a:r>
@@ -6618,9 +6618,9 @@
             <a:r>
               <a:rPr sz="2400" b="0">
                 <a:solidFill>
-                  <a:srgbClr val="20190F"/>
-                </a:solidFill>
-                <a:latin typeface="Arial"/>
+                  <a:srgbClr val="1C1C1C"/>
+                </a:solidFill>
+                <a:latin typeface="Trebuchet MS"/>
               </a:rPr>
               <a:t>•  Evening buddy, listen then refer</a:t>
             </a:r>
@@ -6642,11 +6642,11 @@
             <a:avLst/>
           </a:prstGeom>
           <a:solidFill>
-            <a:srgbClr val="FBF6EC"/>
+            <a:srgbClr val="C9A77C"/>
           </a:solidFill>
           <a:ln w="15875">
             <a:solidFill>
-              <a:srgbClr val="E2D8C4"/>
+              <a:srgbClr val="2C6FB7"/>
             </a:solidFill>
           </a:ln>
           <a:effectLst/>
@@ -6703,9 +6703,9 @@
             <a:r>
               <a:rPr sz="1200" b="1">
                 <a:solidFill>
-                  <a:srgbClr val="C07A1E"/>
-                </a:solidFill>
-                <a:latin typeface="Arial"/>
+                  <a:srgbClr val="D2452C"/>
+                </a:solidFill>
+                <a:latin typeface="Trebuchet MS"/>
               </a:rPr>
               <a:t>POSTER ART · T-P18-ART · coming</a:t>
             </a:r>
@@ -6742,9 +6742,9 @@
             <a:r>
               <a:rPr sz="1800" b="1">
                 <a:solidFill>
-                  <a:srgbClr val="1F4D2B"/>
-                </a:solidFill>
-                <a:latin typeface="Georgia"/>
+                  <a:srgbClr val="1C1C1C"/>
+                </a:solidFill>
+                <a:latin typeface="Segoe Print"/>
               </a:rPr>
               <a:t>Artwork for T-P18 · Keep the teacher strong</a:t>
             </a:r>
@@ -6781,9 +6781,9 @@
             <a:r>
               <a:rPr sz="1100" b="0">
                 <a:solidFill>
-                  <a:srgbClr val="20190F"/>
-                </a:solidFill>
-                <a:latin typeface="Arial"/>
+                  <a:srgbClr val="1C1C1C"/>
+                </a:solidFill>
+                <a:latin typeface="Trebuchet MS"/>
               </a:rPr>
               <a:t>A facilitator stands at the centre, relaxed, with six small scenes around her in a ring: (1) three small hall shapes followed by a house with a garden (three courses, then home); (2) a facilitator alone setting out chairs in an empty hall (Day 0); (3) a facilitator drinking from a water bottle, one hand raised as a quiet signal; (4) a facilitator sitting…</a:t>
             </a:r>
@@ -6804,7 +6804,7 @@
     <p:bg>
       <p:bgPr>
         <a:solidFill>
-          <a:srgbClr val="F7F2E9"/>
+          <a:srgbClr val="C9A77C"/>
         </a:solidFill>
         <a:effectLst/>
       </p:bgPr>
@@ -6846,9 +6846,9 @@
             <a:r>
               <a:rPr sz="1000" b="0">
                 <a:solidFill>
-                  <a:srgbClr val="6B6255"/>
-                </a:solidFill>
-                <a:latin typeface="Arial"/>
+                  <a:srgbClr val="1C1C1C"/>
+                </a:solidFill>
+                <a:latin typeface="Trebuchet MS"/>
               </a:rPr>
               <a:t>T-D5-14   ·   Poster T-P14</a:t>
             </a:r>
@@ -6885,9 +6885,9 @@
             <a:r>
               <a:rPr sz="1000" b="0">
                 <a:solidFill>
-                  <a:srgbClr val="6B6255"/>
-                </a:solidFill>
-                <a:latin typeface="Arial"/>
+                  <a:srgbClr val="1C1C1C"/>
+                </a:solidFill>
+                <a:latin typeface="Trebuchet MS"/>
               </a:rPr>
               <a:t>Teach the Teachers</a:t>
             </a:r>
@@ -6909,7 +6909,7 @@
             <a:avLst/>
           </a:prstGeom>
           <a:solidFill>
-            <a:srgbClr val="C07A1E"/>
+            <a:srgbClr val="D2452C"/>
           </a:solidFill>
           <a:ln>
             <a:noFill/>
@@ -6968,9 +6968,9 @@
             <a:r>
               <a:rPr sz="1400" b="1">
                 <a:solidFill>
-                  <a:srgbClr val="F7F2E9"/>
-                </a:solidFill>
-                <a:latin typeface="Arial"/>
+                  <a:srgbClr val="C9A77C"/>
+                </a:solidFill>
+                <a:latin typeface="Trebuchet MS"/>
               </a:rPr>
               <a:t>YOUR TURN</a:t>
             </a:r>
@@ -7007,9 +7007,9 @@
             <a:r>
               <a:rPr sz="3800" b="1">
                 <a:solidFill>
-                  <a:srgbClr val="1F4D2B"/>
-                </a:solidFill>
-                <a:latin typeface="Georgia"/>
+                  <a:srgbClr val="1C1C1C"/>
+                </a:solidFill>
+                <a:latin typeface="Segoe Print"/>
               </a:rPr>
               <a:t>My teaching plan</a:t>
             </a:r>
@@ -7031,7 +7031,7 @@
             <a:avLst/>
           </a:prstGeom>
           <a:solidFill>
-            <a:srgbClr val="E2D8C4"/>
+            <a:srgbClr val="2C6FB7"/>
           </a:solidFill>
           <a:ln>
             <a:noFill/>
@@ -7090,9 +7090,9 @@
             <a:r>
               <a:rPr sz="3000" b="1">
                 <a:solidFill>
-                  <a:srgbClr val="20190F"/>
-                </a:solidFill>
-                <a:latin typeface="Arial"/>
+                  <a:srgbClr val="1C1C1C"/>
+                </a:solidFill>
+                <a:latin typeface="Trebuchet MS"/>
               </a:rPr>
               <a:t>•  My first course, my sessions</a:t>
             </a:r>
@@ -7106,9 +7106,9 @@
             <a:r>
               <a:rPr sz="3000" b="1">
                 <a:solidFill>
-                  <a:srgbClr val="20190F"/>
-                </a:solidFill>
-                <a:latin typeface="Arial"/>
+                  <a:srgbClr val="1C1C1C"/>
+                </a:solidFill>
+                <a:latin typeface="Trebuchet MS"/>
               </a:rPr>
               <a:t>•  Two strengths, one growth area</a:t>
             </a:r>
@@ -7122,9 +7122,9 @@
             <a:r>
               <a:rPr sz="3000" b="1">
                 <a:solidFill>
-                  <a:srgbClr val="20190F"/>
-                </a:solidFill>
-                <a:latin typeface="Arial"/>
+                  <a:srgbClr val="1C1C1C"/>
+                </a:solidFill>
+                <a:latin typeface="Trebuchet MS"/>
               </a:rPr>
               <a:t>•  Observed again within 8 weeks</a:t>
             </a:r>
@@ -7146,11 +7146,11 @@
             <a:avLst/>
           </a:prstGeom>
           <a:solidFill>
-            <a:srgbClr val="FBF6EC"/>
+            <a:srgbClr val="C9A77C"/>
           </a:solidFill>
           <a:ln w="15875">
             <a:solidFill>
-              <a:srgbClr val="E2D8C4"/>
+              <a:srgbClr val="2C6FB7"/>
             </a:solidFill>
           </a:ln>
           <a:effectLst/>
@@ -7207,9 +7207,9 @@
             <a:r>
               <a:rPr sz="1200" b="1">
                 <a:solidFill>
-                  <a:srgbClr val="C07A1E"/>
-                </a:solidFill>
-                <a:latin typeface="Arial"/>
+                  <a:srgbClr val="D2452C"/>
+                </a:solidFill>
+                <a:latin typeface="Trebuchet MS"/>
               </a:rPr>
               <a:t>IMAGE · T-IMG-11 · coming</a:t>
             </a:r>
@@ -7246,9 +7246,9 @@
             <a:r>
               <a:rPr sz="1800" b="1">
                 <a:solidFill>
-                  <a:srgbClr val="1F4D2B"/>
-                </a:solidFill>
-                <a:latin typeface="Georgia"/>
+                  <a:srgbClr val="1C1C1C"/>
+                </a:solidFill>
+                <a:latin typeface="Segoe Print"/>
               </a:rPr>
               <a:t>Two facilitators, one lesson</a:t>
             </a:r>
@@ -7285,9 +7285,9 @@
             <a:r>
               <a:rPr sz="1100" b="0">
                 <a:solidFill>
-                  <a:srgbClr val="20190F"/>
-                </a:solidFill>
-                <a:latin typeface="Arial"/>
+                  <a:srgbClr val="1C1C1C"/>
+                </a:solidFill>
+                <a:latin typeface="Trebuchet MS"/>
               </a:rPr>
               <a:t>In front of a seated group, a young woman facilitator hands a seedling tray to a young man facilitator, both smiling, like passing a relay baton. Behind them a crate of tools and a clipboard with tally marks on a chair. Learners watch, one already reaching toward the tray.</a:t>
             </a:r>
@@ -7308,7 +7308,7 @@
     <p:bg>
       <p:bgPr>
         <a:solidFill>
-          <a:srgbClr val="F7F2E9"/>
+          <a:srgbClr val="C9A77C"/>
         </a:solidFill>
         <a:effectLst/>
       </p:bgPr>
@@ -7350,9 +7350,9 @@
             <a:r>
               <a:rPr sz="1000" b="0">
                 <a:solidFill>
-                  <a:srgbClr val="6B6255"/>
-                </a:solidFill>
-                <a:latin typeface="Arial"/>
+                  <a:srgbClr val="1C1C1C"/>
+                </a:solidFill>
+                <a:latin typeface="Trebuchet MS"/>
               </a:rPr>
               <a:t>T-D5-15   ·   Poster T-P15</a:t>
             </a:r>
@@ -7389,9 +7389,9 @@
             <a:r>
               <a:rPr sz="1000" b="0">
                 <a:solidFill>
-                  <a:srgbClr val="6B6255"/>
-                </a:solidFill>
-                <a:latin typeface="Arial"/>
+                  <a:srgbClr val="1C1C1C"/>
+                </a:solidFill>
+                <a:latin typeface="Trebuchet MS"/>
               </a:rPr>
               <a:t>Teach the Teachers</a:t>
             </a:r>
@@ -7413,7 +7413,7 @@
             <a:avLst/>
           </a:prstGeom>
           <a:solidFill>
-            <a:srgbClr val="C07A1E"/>
+            <a:srgbClr val="D2452C"/>
           </a:solidFill>
           <a:ln>
             <a:noFill/>
@@ -7472,9 +7472,9 @@
             <a:r>
               <a:rPr sz="1400" b="1">
                 <a:solidFill>
-                  <a:srgbClr val="F7F2E9"/>
-                </a:solidFill>
-                <a:latin typeface="Arial"/>
+                  <a:srgbClr val="C9A77C"/>
+                </a:solidFill>
+                <a:latin typeface="Trebuchet MS"/>
               </a:rPr>
               <a:t>YOUR TURN</a:t>
             </a:r>
@@ -7511,9 +7511,9 @@
             <a:r>
               <a:rPr sz="3800" b="1">
                 <a:solidFill>
-                  <a:srgbClr val="1F4D2B"/>
-                </a:solidFill>
-                <a:latin typeface="Georgia"/>
+                  <a:srgbClr val="1C1C1C"/>
+                </a:solidFill>
+                <a:latin typeface="Segoe Print"/>
               </a:rPr>
               <a:t>Your evaluation</a:t>
             </a:r>
@@ -7535,7 +7535,7 @@
             <a:avLst/>
           </a:prstGeom>
           <a:solidFill>
-            <a:srgbClr val="E2D8C4"/>
+            <a:srgbClr val="2C6FB7"/>
           </a:solidFill>
           <a:ln>
             <a:noFill/>
@@ -7594,9 +7594,9 @@
             <a:r>
               <a:rPr sz="3000" b="1">
                 <a:solidFill>
-                  <a:srgbClr val="20190F"/>
-                </a:solidFill>
-                <a:latin typeface="Arial"/>
+                  <a:srgbClr val="1C1C1C"/>
+                </a:solidFill>
+                <a:latin typeface="Trebuchet MS"/>
               </a:rPr>
               <a:t>•  Fingers 1 to 5</a:t>
             </a:r>
@@ -7610,9 +7610,9 @@
             <a:r>
               <a:rPr sz="3000" b="1">
                 <a:solidFill>
-                  <a:srgbClr val="20190F"/>
-                </a:solidFill>
-                <a:latin typeface="Arial"/>
+                  <a:srgbClr val="1C1C1C"/>
+                </a:solidFill>
+                <a:latin typeface="Trebuchet MS"/>
               </a:rPr>
               <a:t>•  Two stickers on each list</a:t>
             </a:r>
@@ -7634,11 +7634,11 @@
             <a:avLst/>
           </a:prstGeom>
           <a:solidFill>
-            <a:srgbClr val="FBF6EC"/>
+            <a:srgbClr val="C9A77C"/>
           </a:solidFill>
           <a:ln w="15875">
             <a:solidFill>
-              <a:srgbClr val="E2D8C4"/>
+              <a:srgbClr val="2C6FB7"/>
             </a:solidFill>
           </a:ln>
           <a:effectLst/>
@@ -7695,9 +7695,9 @@
             <a:r>
               <a:rPr sz="1200" b="1">
                 <a:solidFill>
-                  <a:srgbClr val="C07A1E"/>
-                </a:solidFill>
-                <a:latin typeface="Arial"/>
+                  <a:srgbClr val="D2452C"/>
+                </a:solidFill>
+                <a:latin typeface="Trebuchet MS"/>
               </a:rPr>
               <a:t>POSTER ART · T-P15-ART · coming</a:t>
             </a:r>
@@ -7734,9 +7734,9 @@
             <a:r>
               <a:rPr sz="1800" b="1">
                 <a:solidFill>
-                  <a:srgbClr val="1F4D2B"/>
-                </a:solidFill>
-                <a:latin typeface="Georgia"/>
+                  <a:srgbClr val="1C1C1C"/>
+                </a:solidFill>
+                <a:latin typeface="Segoe Print"/>
               </a:rPr>
               <a:t>Artwork for T-P15 · Did they learn it?</a:t>
             </a:r>
@@ -7773,9 +7773,9 @@
             <a:r>
               <a:rPr sz="1100" b="0">
                 <a:solidFill>
-                  <a:srgbClr val="20190F"/>
-                </a:solidFill>
-                <a:latin typeface="Arial"/>
+                  <a:srgbClr val="1C1C1C"/>
+                </a:solidFill>
+                <a:latin typeface="Trebuchet MS"/>
               </a:rPr>
               <a:t>Three stacked scenes. ① A co-facilitator with a clipboard watches a farmer adjust the string on an A-frame; on the clipboard three simple symbols: a tick, a half circle, a cross. ② A room with three corners, each with a large picture card on the wall (a sun low, a mulched bed, a bare bed); learners walk to the corners. ③ A group holds up fingers (one to…</a:t>
             </a:r>
@@ -7796,7 +7796,7 @@
     <p:bg>
       <p:bgPr>
         <a:solidFill>
-          <a:srgbClr val="1F4D2B"/>
+          <a:srgbClr val="2F3A33"/>
         </a:solidFill>
         <a:effectLst/>
       </p:bgPr>
@@ -7838,9 +7838,9 @@
             <a:r>
               <a:rPr sz="1000" b="0">
                 <a:solidFill>
-                  <a:srgbClr val="A8D88A"/>
-                </a:solidFill>
-                <a:latin typeface="Arial"/>
+                  <a:srgbClr val="F2EFE6"/>
+                </a:solidFill>
+                <a:latin typeface="Trebuchet MS"/>
               </a:rPr>
               <a:t>T-D5-16   ·   Poster T-P01</a:t>
             </a:r>
@@ -7877,9 +7877,9 @@
             <a:r>
               <a:rPr sz="1000" b="0">
                 <a:solidFill>
-                  <a:srgbClr val="A8D88A"/>
-                </a:solidFill>
-                <a:latin typeface="Arial"/>
+                  <a:srgbClr val="F2EFE6"/>
+                </a:solidFill>
+                <a:latin typeface="Trebuchet MS"/>
               </a:rPr>
               <a:t>Teach the Teachers</a:t>
             </a:r>
@@ -7916,9 +7916,9 @@
             <a:r>
               <a:rPr sz="4800" b="1">
                 <a:solidFill>
-                  <a:srgbClr val="F7F2E9"/>
-                </a:solidFill>
-                <a:latin typeface="Georgia"/>
+                  <a:srgbClr val="F2EFE6"/>
+                </a:solidFill>
+                <a:latin typeface="Segoe Print"/>
               </a:rPr>
               <a:t>Well done, teachers</a:t>
             </a:r>
@@ -7940,7 +7940,7 @@
             <a:avLst/>
           </a:prstGeom>
           <a:solidFill>
-            <a:srgbClr val="C07A1E"/>
+            <a:srgbClr val="D2452C"/>
           </a:solidFill>
           <a:ln>
             <a:noFill/>
@@ -7999,9 +7999,9 @@
             <a:r>
               <a:rPr sz="2400" b="0">
                 <a:solidFill>
-                  <a:srgbClr val="A8D88A"/>
-                </a:solidFill>
-                <a:latin typeface="Arial"/>
+                  <a:srgbClr val="F2EFE6"/>
+                </a:solidFill>
+                <a:latin typeface="Trebuchet MS"/>
               </a:rPr>
               <a:t>Certificate of attendance</a:t>
             </a:r>
@@ -8015,9 +8015,9 @@
             <a:r>
               <a:rPr sz="2400" b="0">
                 <a:solidFill>
-                  <a:srgbClr val="A8D88A"/>
-                </a:solidFill>
-                <a:latin typeface="Arial"/>
+                  <a:srgbClr val="F2EFE6"/>
+                </a:solidFill>
+                <a:latin typeface="Trebuchet MS"/>
               </a:rPr>
               <a:t>Your first farmers are waiting</a:t>
             </a:r>
@@ -8039,11 +8039,11 @@
             <a:avLst/>
           </a:prstGeom>
           <a:solidFill>
-            <a:srgbClr val="FBF6EC"/>
+            <a:srgbClr val="C9A77C"/>
           </a:solidFill>
           <a:ln w="15875">
             <a:solidFill>
-              <a:srgbClr val="E2D8C4"/>
+              <a:srgbClr val="2C6FB7"/>
             </a:solidFill>
           </a:ln>
           <a:effectLst/>
@@ -8100,9 +8100,9 @@
             <a:r>
               <a:rPr sz="1200" b="1">
                 <a:solidFill>
-                  <a:srgbClr val="C07A1E"/>
-                </a:solidFill>
-                <a:latin typeface="Arial"/>
+                  <a:srgbClr val="D2452C"/>
+                </a:solidFill>
+                <a:latin typeface="Trebuchet MS"/>
               </a:rPr>
               <a:t>IMAGE · T-IMG-13 · coming</a:t>
             </a:r>
@@ -8139,9 +8139,9 @@
             <a:r>
               <a:rPr sz="1800" b="1">
                 <a:solidFill>
-                  <a:srgbClr val="1F4D2B"/>
-                </a:solidFill>
-                <a:latin typeface="Georgia"/>
+                  <a:srgbClr val="1C1C1C"/>
+                </a:solidFill>
+                <a:latin typeface="Segoe Print"/>
               </a:rPr>
               <a:t>The certificate handshake</a:t>
             </a:r>
@@ -8178,9 +8178,9 @@
             <a:r>
               <a:rPr sz="1100" b="0">
                 <a:solidFill>
-                  <a:srgbClr val="20190F"/>
-                </a:solidFill>
-                <a:latin typeface="Arial"/>
+                  <a:srgbClr val="1C1C1C"/>
+                </a:solidFill>
+                <a:latin typeface="Trebuchet MS"/>
               </a:rPr>
               <a:t>Inside a hall decorated with posters, an older male trainer shakes hands with a young woman trainee while handing her a certificate (a sheet with a border and a seal shape, no readable text). Colleagues around them clap. Warm, proud mood.</a:t>
             </a:r>
@@ -8201,7 +8201,7 @@
     <p:bg>
       <p:bgPr>
         <a:solidFill>
-          <a:srgbClr val="F7F2E9"/>
+          <a:srgbClr val="C9A77C"/>
         </a:solidFill>
         <a:effectLst/>
       </p:bgPr>
@@ -8243,9 +8243,9 @@
             <a:r>
               <a:rPr sz="1000" b="0">
                 <a:solidFill>
-                  <a:srgbClr val="6B6255"/>
-                </a:solidFill>
-                <a:latin typeface="Arial"/>
+                  <a:srgbClr val="1C1C1C"/>
+                </a:solidFill>
+                <a:latin typeface="Trebuchet MS"/>
               </a:rPr>
               <a:t>T-D5-02   ·   Poster F-P19</a:t>
             </a:r>
@@ -8282,9 +8282,9 @@
             <a:r>
               <a:rPr sz="1000" b="0">
                 <a:solidFill>
-                  <a:srgbClr val="6B6255"/>
-                </a:solidFill>
-                <a:latin typeface="Arial"/>
+                  <a:srgbClr val="1C1C1C"/>
+                </a:solidFill>
+                <a:latin typeface="Trebuchet MS"/>
               </a:rPr>
               <a:t>Teach the Teachers</a:t>
             </a:r>
@@ -8321,9 +8321,9 @@
             <a:r>
               <a:rPr sz="3800" b="1">
                 <a:solidFill>
-                  <a:srgbClr val="1F4D2B"/>
-                </a:solidFill>
-                <a:latin typeface="Georgia"/>
+                  <a:srgbClr val="1C1C1C"/>
+                </a:solidFill>
+                <a:latin typeface="Segoe Print"/>
               </a:rPr>
               <a:t>Fill the plate</a:t>
             </a:r>
@@ -8345,7 +8345,7 @@
             <a:avLst/>
           </a:prstGeom>
           <a:solidFill>
-            <a:srgbClr val="E2D8C4"/>
+            <a:srgbClr val="2C6FB7"/>
           </a:solidFill>
           <a:ln>
             <a:noFill/>
@@ -8404,9 +8404,9 @@
             <a:r>
               <a:rPr sz="2800" b="0">
                 <a:solidFill>
-                  <a:srgbClr val="20190F"/>
-                </a:solidFill>
-                <a:latin typeface="Arial"/>
+                  <a:srgbClr val="1C1C1C"/>
+                </a:solidFill>
+                <a:latin typeface="Trebuchet MS"/>
               </a:rPr>
               <a:t>•  Fill a child's plate for a day</a:t>
             </a:r>
@@ -8420,9 +8420,9 @@
             <a:r>
               <a:rPr sz="2800" b="0">
                 <a:solidFill>
-                  <a:srgbClr val="20190F"/>
-                </a:solidFill>
-                <a:latin typeface="Arial"/>
+                  <a:srgbClr val="1C1C1C"/>
+                </a:solidFill>
+                <a:latin typeface="Trebuchet MS"/>
               </a:rPr>
               <a:t>•  What's missing?</a:t>
             </a:r>
@@ -8444,11 +8444,11 @@
             <a:avLst/>
           </a:prstGeom>
           <a:solidFill>
-            <a:srgbClr val="FBF6EC"/>
+            <a:srgbClr val="C9A77C"/>
           </a:solidFill>
           <a:ln w="15875">
             <a:solidFill>
-              <a:srgbClr val="E2D8C4"/>
+              <a:srgbClr val="2C6FB7"/>
             </a:solidFill>
           </a:ln>
           <a:effectLst/>
@@ -8505,9 +8505,9 @@
             <a:r>
               <a:rPr sz="1200" b="1">
                 <a:solidFill>
-                  <a:srgbClr val="C07A1E"/>
-                </a:solidFill>
-                <a:latin typeface="Arial"/>
+                  <a:srgbClr val="D2452C"/>
+                </a:solidFill>
+                <a:latin typeface="Trebuchet MS"/>
               </a:rPr>
               <a:t>IMAGE · T-IMG-12 · coming</a:t>
             </a:r>
@@ -8544,9 +8544,9 @@
             <a:r>
               <a:rPr sz="1800" b="1">
                 <a:solidFill>
-                  <a:srgbClr val="1F4D2B"/>
-                </a:solidFill>
-                <a:latin typeface="Georgia"/>
+                  <a:srgbClr val="1C1C1C"/>
+                </a:solidFill>
+                <a:latin typeface="Segoe Print"/>
               </a:rPr>
               <a:t>Beans in tins</a:t>
             </a:r>
@@ -8583,9 +8583,9 @@
             <a:r>
               <a:rPr sz="1100" b="0">
                 <a:solidFill>
-                  <a:srgbClr val="20190F"/>
-                </a:solidFill>
-                <a:latin typeface="Arial"/>
+                  <a:srgbClr val="1C1C1C"/>
+                </a:solidFill>
+                <a:latin typeface="Trebuchet MS"/>
               </a:rPr>
               <a:t>On a wooden table: two tins, one with a drawn arrow pointing in, one with an arrow pointing out (arrows as shapes, no letters); a pile of dried beans; a ruled sheet with small pictures heading each column (a calendar page, a coin going in, a coin going out, a spinach bunch); a plate with vegetables of many colours (orange butternut, dark green leaves,…</a:t>
             </a:r>
@@ -8606,7 +8606,7 @@
     <p:bg>
       <p:bgPr>
         <a:solidFill>
-          <a:srgbClr val="F7F2E9"/>
+          <a:srgbClr val="C9A77C"/>
         </a:solidFill>
         <a:effectLst/>
       </p:bgPr>
@@ -8648,9 +8648,9 @@
             <a:r>
               <a:rPr sz="1000" b="0">
                 <a:solidFill>
-                  <a:srgbClr val="6B6255"/>
-                </a:solidFill>
-                <a:latin typeface="Arial"/>
+                  <a:srgbClr val="1C1C1C"/>
+                </a:solidFill>
+                <a:latin typeface="Trebuchet MS"/>
               </a:rPr>
               <a:t>T-D5-03   ·   Poster F-P20</a:t>
             </a:r>
@@ -8687,9 +8687,9 @@
             <a:r>
               <a:rPr sz="1000" b="0">
                 <a:solidFill>
-                  <a:srgbClr val="6B6255"/>
-                </a:solidFill>
-                <a:latin typeface="Arial"/>
+                  <a:srgbClr val="1C1C1C"/>
+                </a:solidFill>
+                <a:latin typeface="Trebuchet MS"/>
               </a:rPr>
               <a:t>Teach the Teachers</a:t>
             </a:r>
@@ -8711,7 +8711,7 @@
             <a:avLst/>
           </a:prstGeom>
           <a:solidFill>
-            <a:srgbClr val="C07A1E"/>
+            <a:srgbClr val="D2452C"/>
           </a:solidFill>
           <a:ln>
             <a:noFill/>
@@ -8770,9 +8770,9 @@
             <a:r>
               <a:rPr sz="1400" b="1">
                 <a:solidFill>
-                  <a:srgbClr val="F7F2E9"/>
-                </a:solidFill>
-                <a:latin typeface="Arial"/>
+                  <a:srgbClr val="C9A77C"/>
+                </a:solidFill>
+                <a:latin typeface="Trebuchet MS"/>
               </a:rPr>
               <a:t>YOUR TURN</a:t>
             </a:r>
@@ -8809,9 +8809,9 @@
             <a:r>
               <a:rPr sz="3800" b="1">
                 <a:solidFill>
-                  <a:srgbClr val="1F4D2B"/>
-                </a:solidFill>
-                <a:latin typeface="Georgia"/>
+                  <a:srgbClr val="1C1C1C"/>
+                </a:solidFill>
+                <a:latin typeface="Segoe Print"/>
               </a:rPr>
               <a:t>Beans and tins</a:t>
             </a:r>
@@ -8833,7 +8833,7 @@
             <a:avLst/>
           </a:prstGeom>
           <a:solidFill>
-            <a:srgbClr val="E2D8C4"/>
+            <a:srgbClr val="2C6FB7"/>
           </a:solidFill>
           <a:ln>
             <a:noFill/>
@@ -8892,9 +8892,9 @@
             <a:r>
               <a:rPr sz="3000" b="1">
                 <a:solidFill>
-                  <a:srgbClr val="20190F"/>
-                </a:solidFill>
-                <a:latin typeface="Arial"/>
+                  <a:srgbClr val="1C1C1C"/>
+                </a:solidFill>
+                <a:latin typeface="Trebuchet MS"/>
               </a:rPr>
               <a:t>•  One bean = R5</a:t>
             </a:r>
@@ -8908,9 +8908,9 @@
             <a:r>
               <a:rPr sz="3000" b="1">
                 <a:solidFill>
-                  <a:srgbClr val="20190F"/>
-                </a:solidFill>
-                <a:latin typeface="Arial"/>
+                  <a:srgbClr val="1C1C1C"/>
+                </a:solidFill>
+                <a:latin typeface="Trebuchet MS"/>
               </a:rPr>
               <a:t>•  Move beans for each event</a:t>
             </a:r>
@@ -8924,9 +8924,9 @@
             <a:r>
               <a:rPr sz="3000" b="1">
                 <a:solidFill>
-                  <a:srgbClr val="20190F"/>
-                </a:solidFill>
-                <a:latin typeface="Arial"/>
+                  <a:srgbClr val="1C1C1C"/>
+                </a:solidFill>
+                <a:latin typeface="Trebuchet MS"/>
               </a:rPr>
               <a:t>•  Draw it in the money book</a:t>
             </a:r>
@@ -8948,11 +8948,11 @@
             <a:avLst/>
           </a:prstGeom>
           <a:solidFill>
-            <a:srgbClr val="FBF6EC"/>
+            <a:srgbClr val="C9A77C"/>
           </a:solidFill>
           <a:ln w="15875">
             <a:solidFill>
-              <a:srgbClr val="E2D8C4"/>
+              <a:srgbClr val="2C6FB7"/>
             </a:solidFill>
           </a:ln>
           <a:effectLst/>
@@ -9009,9 +9009,9 @@
             <a:r>
               <a:rPr sz="1200" b="1">
                 <a:solidFill>
-                  <a:srgbClr val="C07A1E"/>
-                </a:solidFill>
-                <a:latin typeface="Arial"/>
+                  <a:srgbClr val="D2452C"/>
+                </a:solidFill>
+                <a:latin typeface="Trebuchet MS"/>
               </a:rPr>
               <a:t>IMAGE · T-IMG-12 · coming</a:t>
             </a:r>
@@ -9048,9 +9048,9 @@
             <a:r>
               <a:rPr sz="1800" b="1">
                 <a:solidFill>
-                  <a:srgbClr val="1F4D2B"/>
-                </a:solidFill>
-                <a:latin typeface="Georgia"/>
+                  <a:srgbClr val="1C1C1C"/>
+                </a:solidFill>
+                <a:latin typeface="Segoe Print"/>
               </a:rPr>
               <a:t>Beans in tins</a:t>
             </a:r>
@@ -9087,9 +9087,9 @@
             <a:r>
               <a:rPr sz="1100" b="0">
                 <a:solidFill>
-                  <a:srgbClr val="20190F"/>
-                </a:solidFill>
-                <a:latin typeface="Arial"/>
+                  <a:srgbClr val="1C1C1C"/>
+                </a:solidFill>
+                <a:latin typeface="Trebuchet MS"/>
               </a:rPr>
               <a:t>On a wooden table: two tins, one with a drawn arrow pointing in, one with an arrow pointing out (arrows as shapes, no letters); a pile of dried beans; a ruled sheet with small pictures heading each column (a calendar page, a coin going in, a coin going out, a spinach bunch); a plate with vegetables of many colours (orange butternut, dark green leaves,…</a:t>
             </a:r>
@@ -9110,7 +9110,7 @@
     <p:bg>
       <p:bgPr>
         <a:solidFill>
-          <a:srgbClr val="F7F2E9"/>
+          <a:srgbClr val="C9A77C"/>
         </a:solidFill>
         <a:effectLst/>
       </p:bgPr>
@@ -9152,9 +9152,9 @@
             <a:r>
               <a:rPr sz="1000" b="0">
                 <a:solidFill>
-                  <a:srgbClr val="6B6255"/>
-                </a:solidFill>
-                <a:latin typeface="Arial"/>
+                  <a:srgbClr val="1C1C1C"/>
+                </a:solidFill>
+                <a:latin typeface="Trebuchet MS"/>
               </a:rPr>
               <a:t>T-D5-04   ·   Poster F-P20</a:t>
             </a:r>
@@ -9191,9 +9191,9 @@
             <a:r>
               <a:rPr sz="1000" b="0">
                 <a:solidFill>
-                  <a:srgbClr val="6B6255"/>
-                </a:solidFill>
-                <a:latin typeface="Arial"/>
+                  <a:srgbClr val="1C1C1C"/>
+                </a:solidFill>
+                <a:latin typeface="Trebuchet MS"/>
               </a:rPr>
               <a:t>Teach the Teachers</a:t>
             </a:r>
@@ -9230,9 +9230,9 @@
             <a:r>
               <a:rPr sz="3800" b="1">
                 <a:solidFill>
-                  <a:srgbClr val="1F4D2B"/>
-                </a:solidFill>
-                <a:latin typeface="Georgia"/>
+                  <a:srgbClr val="1C1C1C"/>
+                </a:solidFill>
+                <a:latin typeface="Segoe Print"/>
               </a:rPr>
               <a:t>Numbers without reading</a:t>
             </a:r>
@@ -9254,7 +9254,7 @@
             <a:avLst/>
           </a:prstGeom>
           <a:solidFill>
-            <a:srgbClr val="E2D8C4"/>
+            <a:srgbClr val="2C6FB7"/>
           </a:solidFill>
           <a:ln>
             <a:noFill/>
@@ -9313,9 +9313,9 @@
             <a:r>
               <a:rPr sz="2800" b="0">
                 <a:solidFill>
-                  <a:srgbClr val="20190F"/>
-                </a:solidFill>
-                <a:latin typeface="Arial"/>
+                  <a:srgbClr val="1C1C1C"/>
+                </a:solidFill>
+                <a:latin typeface="Trebuchet MS"/>
               </a:rPr>
               <a:t>•  Beans, tins, picture cards</a:t>
             </a:r>
@@ -9329,9 +9329,9 @@
             <a:r>
               <a:rPr sz="2800" b="0">
                 <a:solidFill>
-                  <a:srgbClr val="20190F"/>
-                </a:solidFill>
-                <a:latin typeface="Arial"/>
+                  <a:srgbClr val="1C1C1C"/>
+                </a:solidFill>
+                <a:latin typeface="Trebuchet MS"/>
               </a:rPr>
               <a:t>•  One event at a time</a:t>
             </a:r>
@@ -9345,9 +9345,9 @@
             <a:r>
               <a:rPr sz="2800" b="0">
                 <a:solidFill>
-                  <a:srgbClr val="20190F"/>
-                </a:solidFill>
-                <a:latin typeface="Arial"/>
+                  <a:srgbClr val="1C1C1C"/>
+                </a:solidFill>
+                <a:latin typeface="Trebuchet MS"/>
               </a:rPr>
               <a:t>•  Groups check each other</a:t>
             </a:r>
@@ -9393,7 +9393,7 @@
             <a:avLst/>
           </a:prstGeom>
           <a:solidFill>
-            <a:srgbClr val="20190F"/>
+            <a:srgbClr val="1C1C1C"/>
           </a:solidFill>
           <a:ln>
             <a:noFill/>
@@ -9452,9 +9452,9 @@
             <a:r>
               <a:rPr sz="1100" b="0">
                 <a:solidFill>
-                  <a:srgbClr val="F7F2E9"/>
-                </a:solidFill>
-                <a:latin typeface="Arial"/>
+                  <a:srgbClr val="C9A77C"/>
+                </a:solidFill>
+                <a:latin typeface="Trebuchet MS"/>
               </a:rPr>
               <a:t>▶  Clip T-ANI-23 · play from the tablet: watch-04-farm-record.mp4</a:t>
             </a:r>
@@ -9475,7 +9475,7 @@
     <p:bg>
       <p:bgPr>
         <a:solidFill>
-          <a:srgbClr val="1F4D2B"/>
+          <a:srgbClr val="2F3A33"/>
         </a:solidFill>
         <a:effectLst/>
       </p:bgPr>
@@ -9517,9 +9517,9 @@
             <a:r>
               <a:rPr sz="1000" b="0">
                 <a:solidFill>
-                  <a:srgbClr val="A8D88A"/>
-                </a:solidFill>
-                <a:latin typeface="Arial"/>
+                  <a:srgbClr val="F2EFE6"/>
+                </a:solidFill>
+                <a:latin typeface="Trebuchet MS"/>
               </a:rPr>
               <a:t>T-D5-05   ·   Poster T-P03</a:t>
             </a:r>
@@ -9556,9 +9556,9 @@
             <a:r>
               <a:rPr sz="1000" b="0">
                 <a:solidFill>
-                  <a:srgbClr val="A8D88A"/>
-                </a:solidFill>
-                <a:latin typeface="Arial"/>
+                  <a:srgbClr val="F2EFE6"/>
+                </a:solidFill>
+                <a:latin typeface="Trebuchet MS"/>
               </a:rPr>
               <a:t>Teach the Teachers</a:t>
             </a:r>
@@ -9595,9 +9595,9 @@
             <a:r>
               <a:rPr sz="4800" b="1">
                 <a:solidFill>
-                  <a:srgbClr val="F7F2E9"/>
-                </a:solidFill>
-                <a:latin typeface="Georgia"/>
+                  <a:srgbClr val="F2EFE6"/>
+                </a:solidFill>
+                <a:latin typeface="Segoe Print"/>
               </a:rPr>
               <a:t>Final teaching practice</a:t>
             </a:r>
@@ -9619,7 +9619,7 @@
             <a:avLst/>
           </a:prstGeom>
           <a:solidFill>
-            <a:srgbClr val="C07A1E"/>
+            <a:srgbClr val="D2452C"/>
           </a:solidFill>
           <a:ln>
             <a:noFill/>
@@ -9678,9 +9678,9 @@
             <a:r>
               <a:rPr sz="2400" b="0">
                 <a:solidFill>
-                  <a:srgbClr val="A8D88A"/>
-                </a:solidFill>
-                <a:latin typeface="Arial"/>
+                  <a:srgbClr val="F2EFE6"/>
+                </a:solidFill>
+                <a:latin typeface="Trebuchet MS"/>
               </a:rPr>
               <a:t>30 minutes, pairs</a:t>
             </a:r>
@@ -9694,9 +9694,9 @@
             <a:r>
               <a:rPr sz="2400" b="0">
                 <a:solidFill>
-                  <a:srgbClr val="A8D88A"/>
-                </a:solidFill>
-                <a:latin typeface="Arial"/>
+                  <a:srgbClr val="F2EFE6"/>
+                </a:solidFill>
+                <a:latin typeface="Trebuchet MS"/>
               </a:rPr>
               <a:t>A real Course 1 session</a:t>
             </a:r>
@@ -9718,11 +9718,11 @@
             <a:avLst/>
           </a:prstGeom>
           <a:solidFill>
-            <a:srgbClr val="FBF6EC"/>
+            <a:srgbClr val="C9A77C"/>
           </a:solidFill>
           <a:ln w="15875">
             <a:solidFill>
-              <a:srgbClr val="E2D8C4"/>
+              <a:srgbClr val="2C6FB7"/>
             </a:solidFill>
           </a:ln>
           <a:effectLst/>
@@ -9779,9 +9779,9 @@
             <a:r>
               <a:rPr sz="1200" b="1">
                 <a:solidFill>
-                  <a:srgbClr val="C07A1E"/>
-                </a:solidFill>
-                <a:latin typeface="Arial"/>
+                  <a:srgbClr val="D2452C"/>
+                </a:solidFill>
+                <a:latin typeface="Trebuchet MS"/>
               </a:rPr>
               <a:t>IMAGE · T-IMG-11 · coming</a:t>
             </a:r>
@@ -9818,9 +9818,9 @@
             <a:r>
               <a:rPr sz="1800" b="1">
                 <a:solidFill>
-                  <a:srgbClr val="1F4D2B"/>
-                </a:solidFill>
-                <a:latin typeface="Georgia"/>
+                  <a:srgbClr val="1C1C1C"/>
+                </a:solidFill>
+                <a:latin typeface="Segoe Print"/>
               </a:rPr>
               <a:t>Two facilitators, one lesson</a:t>
             </a:r>
@@ -9857,9 +9857,9 @@
             <a:r>
               <a:rPr sz="1100" b="0">
                 <a:solidFill>
-                  <a:srgbClr val="20190F"/>
-                </a:solidFill>
-                <a:latin typeface="Arial"/>
+                  <a:srgbClr val="1C1C1C"/>
+                </a:solidFill>
+                <a:latin typeface="Trebuchet MS"/>
               </a:rPr>
               <a:t>In front of a seated group, a young woman facilitator hands a seedling tray to a young man facilitator, both smiling, like passing a relay baton. Behind them a crate of tools and a clipboard with tally marks on a chair. Learners watch, one already reaching toward the tray.</a:t>
             </a:r>
@@ -9880,7 +9880,7 @@
     <p:bg>
       <p:bgPr>
         <a:solidFill>
-          <a:srgbClr val="F7F2E9"/>
+          <a:srgbClr val="C9A77C"/>
         </a:solidFill>
         <a:effectLst/>
       </p:bgPr>
@@ -9922,9 +9922,9 @@
             <a:r>
               <a:rPr sz="1000" b="0">
                 <a:solidFill>
-                  <a:srgbClr val="6B6255"/>
-                </a:solidFill>
-                <a:latin typeface="Arial"/>
+                  <a:srgbClr val="1C1C1C"/>
+                </a:solidFill>
+                <a:latin typeface="Trebuchet MS"/>
               </a:rPr>
               <a:t>T-D5-06   ·   Poster T-P07</a:t>
             </a:r>
@@ -9961,9 +9961,9 @@
             <a:r>
               <a:rPr sz="1000" b="0">
                 <a:solidFill>
-                  <a:srgbClr val="6B6255"/>
-                </a:solidFill>
-                <a:latin typeface="Arial"/>
+                  <a:srgbClr val="1C1C1C"/>
+                </a:solidFill>
+                <a:latin typeface="Trebuchet MS"/>
               </a:rPr>
               <a:t>Teach the Teachers</a:t>
             </a:r>
@@ -9985,7 +9985,7 @@
             <a:avLst/>
           </a:prstGeom>
           <a:solidFill>
-            <a:srgbClr val="C07A1E"/>
+            <a:srgbClr val="D2452C"/>
           </a:solidFill>
           <a:ln>
             <a:noFill/>
@@ -10044,9 +10044,9 @@
             <a:r>
               <a:rPr sz="1400" b="1">
                 <a:solidFill>
-                  <a:srgbClr val="F7F2E9"/>
-                </a:solidFill>
-                <a:latin typeface="Arial"/>
+                  <a:srgbClr val="C9A77C"/>
+                </a:solidFill>
+                <a:latin typeface="Trebuchet MS"/>
               </a:rPr>
               <a:t>YOUR TURN</a:t>
             </a:r>
@@ -10083,9 +10083,9 @@
             <a:r>
               <a:rPr sz="3800" b="1">
                 <a:solidFill>
-                  <a:srgbClr val="1F4D2B"/>
-                </a:solidFill>
-                <a:latin typeface="Georgia"/>
+                  <a:srgbClr val="1C1C1C"/>
+                </a:solidFill>
+                <a:latin typeface="Segoe Print"/>
               </a:rPr>
               <a:t>We are your farmers</a:t>
             </a:r>
@@ -10107,7 +10107,7 @@
             <a:avLst/>
           </a:prstGeom>
           <a:solidFill>
-            <a:srgbClr val="E2D8C4"/>
+            <a:srgbClr val="2C6FB7"/>
           </a:solidFill>
           <a:ln>
             <a:noFill/>
@@ -10166,9 +10166,9 @@
             <a:r>
               <a:rPr sz="3000" b="1">
                 <a:solidFill>
-                  <a:srgbClr val="20190F"/>
-                </a:solidFill>
-                <a:latin typeface="Arial"/>
+                  <a:srgbClr val="1C1C1C"/>
+                </a:solidFill>
+                <a:latin typeface="Trebuchet MS"/>
               </a:rPr>
               <a:t>•  Your hand-made poster up</a:t>
             </a:r>
@@ -10182,9 +10182,9 @@
             <a:r>
               <a:rPr sz="3000" b="1">
                 <a:solidFill>
-                  <a:srgbClr val="20190F"/>
-                </a:solidFill>
-                <a:latin typeface="Arial"/>
+                  <a:srgbClr val="1C1C1C"/>
+                </a:solidFill>
+                <a:latin typeface="Trebuchet MS"/>
               </a:rPr>
               <a:t>•  Practical in two groups of 4</a:t>
             </a:r>
@@ -10198,9 +10198,9 @@
             <a:r>
               <a:rPr sz="3000" b="1">
                 <a:solidFill>
-                  <a:srgbClr val="20190F"/>
-                </a:solidFill>
-                <a:latin typeface="Arial"/>
+                  <a:srgbClr val="1C1C1C"/>
+                </a:solidFill>
+                <a:latin typeface="Trebuchet MS"/>
               </a:rPr>
               <a:t>•  Expect real questions</a:t>
             </a:r>
@@ -10222,11 +10222,11 @@
             <a:avLst/>
           </a:prstGeom>
           <a:solidFill>
-            <a:srgbClr val="FBF6EC"/>
+            <a:srgbClr val="C9A77C"/>
           </a:solidFill>
           <a:ln w="15875">
             <a:solidFill>
-              <a:srgbClr val="E2D8C4"/>
+              <a:srgbClr val="2C6FB7"/>
             </a:solidFill>
           </a:ln>
           <a:effectLst/>
@@ -10283,9 +10283,9 @@
             <a:r>
               <a:rPr sz="1200" b="1">
                 <a:solidFill>
-                  <a:srgbClr val="C07A1E"/>
-                </a:solidFill>
-                <a:latin typeface="Arial"/>
+                  <a:srgbClr val="D2452C"/>
+                </a:solidFill>
+                <a:latin typeface="Trebuchet MS"/>
               </a:rPr>
               <a:t>IMAGE · T-IMG-05 · coming</a:t>
             </a:r>
@@ -10322,9 +10322,9 @@
             <a:r>
               <a:rPr sz="1800" b="1">
                 <a:solidFill>
-                  <a:srgbClr val="1F4D2B"/>
-                </a:solidFill>
-                <a:latin typeface="Georgia"/>
+                  <a:srgbClr val="1C1C1C"/>
+                </a:solidFill>
+                <a:latin typeface="Segoe Print"/>
               </a:rPr>
               <a:t>A micro-teach in a small circle</a:t>
             </a:r>
@@ -10361,9 +10361,9 @@
             <a:r>
               <a:rPr sz="1100" b="0">
                 <a:solidFill>
-                  <a:srgbClr val="20190F"/>
-                </a:solidFill>
-                <a:latin typeface="Arial"/>
+                  <a:srgbClr val="1C1C1C"/>
+                </a:solidFill>
+                <a:latin typeface="Trebuchet MS"/>
               </a:rPr>
               <a:t>Five adults in a small circle of chairs in the corner of a hall. One young man (teaching) holds up a cut-open 2 ℓ bottle of soil while three peers lean forward, one pouring water. A fourth person, an older woman, sits slightly back with a clipboard, making tally marks (simple strokes). A second person holds up a small red card (the STOP card, no text). A…</a:t>
             </a:r>
@@ -10384,7 +10384,7 @@
     <p:bg>
       <p:bgPr>
         <a:solidFill>
-          <a:srgbClr val="F7F2E9"/>
+          <a:srgbClr val="C9A77C"/>
         </a:solidFill>
         <a:effectLst/>
       </p:bgPr>
@@ -10426,9 +10426,9 @@
             <a:r>
               <a:rPr sz="1000" b="0">
                 <a:solidFill>
-                  <a:srgbClr val="6B6255"/>
-                </a:solidFill>
-                <a:latin typeface="Arial"/>
+                  <a:srgbClr val="1C1C1C"/>
+                </a:solidFill>
+                <a:latin typeface="Trebuchet MS"/>
               </a:rPr>
               <a:t>T-D5-07   ·   Poster T-P10</a:t>
             </a:r>
@@ -10465,9 +10465,9 @@
             <a:r>
               <a:rPr sz="1000" b="0">
                 <a:solidFill>
-                  <a:srgbClr val="6B6255"/>
-                </a:solidFill>
-                <a:latin typeface="Arial"/>
+                  <a:srgbClr val="1C1C1C"/>
+                </a:solidFill>
+                <a:latin typeface="Trebuchet MS"/>
               </a:rPr>
               <a:t>Teach the Teachers</a:t>
             </a:r>
@@ -10504,9 +10504,9 @@
             <a:r>
               <a:rPr sz="3800" b="1">
                 <a:solidFill>
-                  <a:srgbClr val="1F4D2B"/>
-                </a:solidFill>
-                <a:latin typeface="Georgia"/>
+                  <a:srgbClr val="1C1C1C"/>
+                </a:solidFill>
+                <a:latin typeface="Segoe Print"/>
               </a:rPr>
               <a:t>Feedback: 10 minutes</a:t>
             </a:r>
@@ -10528,7 +10528,7 @@
             <a:avLst/>
           </a:prstGeom>
           <a:solidFill>
-            <a:srgbClr val="E2D8C4"/>
+            <a:srgbClr val="2C6FB7"/>
           </a:solidFill>
           <a:ln>
             <a:noFill/>
@@ -10587,9 +10587,9 @@
             <a:r>
               <a:rPr sz="2800" b="0">
                 <a:solidFill>
-                  <a:srgbClr val="20190F"/>
-                </a:solidFill>
-                <a:latin typeface="Arial"/>
+                  <a:srgbClr val="1C1C1C"/>
+                </a:solidFill>
+                <a:latin typeface="Trebuchet MS"/>
               </a:rPr>
               <a:t>•  Partners star each other</a:t>
             </a:r>
@@ -10603,9 +10603,9 @@
             <a:r>
               <a:rPr sz="2800" b="0">
                 <a:solidFill>
-                  <a:srgbClr val="20190F"/>
-                </a:solidFill>
-                <a:latin typeface="Arial"/>
+                  <a:srgbClr val="1C1C1C"/>
+                </a:solidFill>
+                <a:latin typeface="Trebuchet MS"/>
               </a:rPr>
               <a:t>•  Observers: numbers and stars</a:t>
             </a:r>
@@ -10619,9 +10619,9 @@
             <a:r>
               <a:rPr sz="2800" b="0">
                 <a:solidFill>
-                  <a:srgbClr val="20190F"/>
-                </a:solidFill>
-                <a:latin typeface="Arial"/>
+                  <a:srgbClr val="1C1C1C"/>
+                </a:solidFill>
+                <a:latin typeface="Trebuchet MS"/>
               </a:rPr>
               <a:t>•  Trainer: two stars and a wish</a:t>
             </a:r>
@@ -10643,11 +10643,11 @@
             <a:avLst/>
           </a:prstGeom>
           <a:solidFill>
-            <a:srgbClr val="FBF6EC"/>
+            <a:srgbClr val="C9A77C"/>
           </a:solidFill>
           <a:ln w="15875">
             <a:solidFill>
-              <a:srgbClr val="E2D8C4"/>
+              <a:srgbClr val="2C6FB7"/>
             </a:solidFill>
           </a:ln>
           <a:effectLst/>
@@ -10704,9 +10704,9 @@
             <a:r>
               <a:rPr sz="1200" b="1">
                 <a:solidFill>
-                  <a:srgbClr val="C07A1E"/>
-                </a:solidFill>
-                <a:latin typeface="Arial"/>
+                  <a:srgbClr val="D2452C"/>
+                </a:solidFill>
+                <a:latin typeface="Trebuchet MS"/>
               </a:rPr>
               <a:t>POSTER ART · T-P10-ART · coming</a:t>
             </a:r>
@@ -10743,9 +10743,9 @@
             <a:r>
               <a:rPr sz="1800" b="1">
                 <a:solidFill>
-                  <a:srgbClr val="1F4D2B"/>
-                </a:solidFill>
-                <a:latin typeface="Georgia"/>
+                  <a:srgbClr val="1C1C1C"/>
+                </a:solidFill>
+                <a:latin typeface="Segoe Print"/>
               </a:rPr>
               <a:t>Artwork for T-P10 · Two stars and a wish</a:t>
             </a:r>
@@ -10782,9 +10782,9 @@
             <a:r>
               <a:rPr sz="1100" b="0">
                 <a:solidFill>
-                  <a:srgbClr val="20190F"/>
-                </a:solidFill>
-                <a:latin typeface="Arial"/>
+                  <a:srgbClr val="1C1C1C"/>
+                </a:solidFill>
+                <a:latin typeface="Trebuchet MS"/>
               </a:rPr>
               <a:t>A small group of four seated in a circle after a lesson. A young woman (the teacher) speaks first, hand open. Opposite her, an older man with a clipboard (the observer) speaks kindly; above him float two big Ochre star shapes and one Leaf-green sprouting seedling shape. The teacher, now with hand on heart, listens and nods. A third person smiles and…</a:t>
             </a:r>
@@ -10805,7 +10805,7 @@
     <p:bg>
       <p:bgPr>
         <a:solidFill>
-          <a:srgbClr val="1F4D2B"/>
+          <a:srgbClr val="2F3A33"/>
         </a:solidFill>
         <a:effectLst/>
       </p:bgPr>
@@ -10847,9 +10847,9 @@
             <a:r>
               <a:rPr sz="1000" b="0">
                 <a:solidFill>
-                  <a:srgbClr val="A8D88A"/>
-                </a:solidFill>
-                <a:latin typeface="Arial"/>
+                  <a:srgbClr val="F2EFE6"/>
+                </a:solidFill>
+                <a:latin typeface="Trebuchet MS"/>
               </a:rPr>
               <a:t>T-D5-08   ·   Poster T-P15</a:t>
             </a:r>
@@ -10886,9 +10886,9 @@
             <a:r>
               <a:rPr sz="1000" b="0">
                 <a:solidFill>
-                  <a:srgbClr val="A8D88A"/>
-                </a:solidFill>
-                <a:latin typeface="Arial"/>
+                  <a:srgbClr val="F2EFE6"/>
+                </a:solidFill>
+                <a:latin typeface="Trebuchet MS"/>
               </a:rPr>
               <a:t>Teach the Teachers</a:t>
             </a:r>
@@ -10925,9 +10925,9 @@
             <a:r>
               <a:rPr sz="4800" b="1">
                 <a:solidFill>
-                  <a:srgbClr val="F7F2E9"/>
-                </a:solidFill>
-                <a:latin typeface="Georgia"/>
+                  <a:srgbClr val="F2EFE6"/>
+                </a:solidFill>
+                <a:latin typeface="Segoe Print"/>
               </a:rPr>
               <a:t>Did they learn it?</a:t>
             </a:r>
@@ -10949,7 +10949,7 @@
             <a:avLst/>
           </a:prstGeom>
           <a:solidFill>
-            <a:srgbClr val="C07A1E"/>
+            <a:srgbClr val="D2452C"/>
           </a:solidFill>
           <a:ln>
             <a:noFill/>
@@ -11008,9 +11008,9 @@
             <a:r>
               <a:rPr sz="2400" b="0">
                 <a:solidFill>
-                  <a:srgbClr val="A8D88A"/>
-                </a:solidFill>
-                <a:latin typeface="Arial"/>
+                  <a:srgbClr val="F2EFE6"/>
+                </a:solidFill>
+                <a:latin typeface="Trebuchet MS"/>
               </a:rPr>
               <a:t>Watch · Quiz · Ask</a:t>
             </a:r>
@@ -11032,11 +11032,11 @@
             <a:avLst/>
           </a:prstGeom>
           <a:solidFill>
-            <a:srgbClr val="FBF6EC"/>
+            <a:srgbClr val="C9A77C"/>
           </a:solidFill>
           <a:ln w="15875">
             <a:solidFill>
-              <a:srgbClr val="E2D8C4"/>
+              <a:srgbClr val="2C6FB7"/>
             </a:solidFill>
           </a:ln>
           <a:effectLst/>
@@ -11093,9 +11093,9 @@
             <a:r>
               <a:rPr sz="1200" b="1">
                 <a:solidFill>
-                  <a:srgbClr val="C07A1E"/>
-                </a:solidFill>
-                <a:latin typeface="Arial"/>
+                  <a:srgbClr val="D2452C"/>
+                </a:solidFill>
+                <a:latin typeface="Trebuchet MS"/>
               </a:rPr>
               <a:t>POSTER ART · T-P15-ART · coming</a:t>
             </a:r>
@@ -11132,9 +11132,9 @@
             <a:r>
               <a:rPr sz="1800" b="1">
                 <a:solidFill>
-                  <a:srgbClr val="1F4D2B"/>
-                </a:solidFill>
-                <a:latin typeface="Georgia"/>
+                  <a:srgbClr val="1C1C1C"/>
+                </a:solidFill>
+                <a:latin typeface="Segoe Print"/>
               </a:rPr>
               <a:t>Artwork for T-P15 · Did they learn it?</a:t>
             </a:r>
@@ -11171,9 +11171,9 @@
             <a:r>
               <a:rPr sz="1100" b="0">
                 <a:solidFill>
-                  <a:srgbClr val="20190F"/>
-                </a:solidFill>
-                <a:latin typeface="Arial"/>
+                  <a:srgbClr val="1C1C1C"/>
+                </a:solidFill>
+                <a:latin typeface="Trebuchet MS"/>
               </a:rPr>
               <a:t>Three stacked scenes. ① A co-facilitator with a clipboard watches a farmer adjust the string on an A-frame; on the clipboard three simple symbols: a tick, a half circle, a cross. ② A room with three corners, each with a large picture card on the wall (a sun low, a mulched bed, a bare bed); learners walk to the corners. ③ A group holds up fingers (one to…</a:t>
             </a:r>
@@ -11194,7 +11194,7 @@
     <p:bg>
       <p:bgPr>
         <a:solidFill>
-          <a:srgbClr val="F7F2E9"/>
+          <a:srgbClr val="C9A77C"/>
         </a:solidFill>
         <a:effectLst/>
       </p:bgPr>
@@ -11236,9 +11236,9 @@
             <a:r>
               <a:rPr sz="1000" b="0">
                 <a:solidFill>
-                  <a:srgbClr val="6B6255"/>
-                </a:solidFill>
-                <a:latin typeface="Arial"/>
+                  <a:srgbClr val="1C1C1C"/>
+                </a:solidFill>
+                <a:latin typeface="Trebuchet MS"/>
               </a:rPr>
               <a:t>T-D5-09   ·   Poster T-P15</a:t>
             </a:r>
@@ -11275,9 +11275,9 @@
             <a:r>
               <a:rPr sz="1000" b="0">
                 <a:solidFill>
-                  <a:srgbClr val="6B6255"/>
-                </a:solidFill>
-                <a:latin typeface="Arial"/>
+                  <a:srgbClr val="1C1C1C"/>
+                </a:solidFill>
+                <a:latin typeface="Trebuchet MS"/>
               </a:rPr>
               <a:t>Teach the Teachers</a:t>
             </a:r>
@@ -11299,7 +11299,7 @@
             <a:avLst/>
           </a:prstGeom>
           <a:solidFill>
-            <a:srgbClr val="C07A1E"/>
+            <a:srgbClr val="D2452C"/>
           </a:solidFill>
           <a:ln>
             <a:noFill/>
@@ -11358,9 +11358,9 @@
             <a:r>
               <a:rPr sz="1400" b="1">
                 <a:solidFill>
-                  <a:srgbClr val="F7F2E9"/>
-                </a:solidFill>
-                <a:latin typeface="Arial"/>
+                  <a:srgbClr val="C9A77C"/>
+                </a:solidFill>
+                <a:latin typeface="Trebuchet MS"/>
               </a:rPr>
               <a:t>YOUR TURN</a:t>
             </a:r>
@@ -11397,9 +11397,9 @@
             <a:r>
               <a:rPr sz="3800" b="1">
                 <a:solidFill>
-                  <a:srgbClr val="1F4D2B"/>
-                </a:solidFill>
-                <a:latin typeface="Georgia"/>
+                  <a:srgbClr val="1C1C1C"/>
+                </a:solidFill>
+                <a:latin typeface="Segoe Print"/>
               </a:rPr>
               <a:t>Picture quiz</a:t>
             </a:r>
@@ -11421,7 +11421,7 @@
             <a:avLst/>
           </a:prstGeom>
           <a:solidFill>
-            <a:srgbClr val="E2D8C4"/>
+            <a:srgbClr val="2C6FB7"/>
           </a:solidFill>
           <a:ln>
             <a:noFill/>
@@ -11480,9 +11480,9 @@
             <a:r>
               <a:rPr sz="3000" b="1">
                 <a:solidFill>
-                  <a:srgbClr val="20190F"/>
-                </a:solidFill>
-                <a:latin typeface="Arial"/>
+                  <a:srgbClr val="1C1C1C"/>
+                </a:solidFill>
+                <a:latin typeface="Trebuchet MS"/>
               </a:rPr>
               <a:t>•  Walk to corner A, B or C</a:t>
             </a:r>
@@ -11496,9 +11496,9 @@
             <a:r>
               <a:rPr sz="3000" b="1">
                 <a:solidFill>
-                  <a:srgbClr val="20190F"/>
-                </a:solidFill>
-                <a:latin typeface="Arial"/>
+                  <a:srgbClr val="1C1C1C"/>
+                </a:solidFill>
+                <a:latin typeface="Trebuchet MS"/>
               </a:rPr>
               <a:t>•  Count heads, not names</a:t>
             </a:r>
@@ -11520,11 +11520,11 @@
             <a:avLst/>
           </a:prstGeom>
           <a:solidFill>
-            <a:srgbClr val="FBF6EC"/>
+            <a:srgbClr val="C9A77C"/>
           </a:solidFill>
           <a:ln w="15875">
             <a:solidFill>
-              <a:srgbClr val="E2D8C4"/>
+              <a:srgbClr val="2C6FB7"/>
             </a:solidFill>
           </a:ln>
           <a:effectLst/>
@@ -11581,9 +11581,9 @@
             <a:r>
               <a:rPr sz="1200" b="1">
                 <a:solidFill>
-                  <a:srgbClr val="C07A1E"/>
-                </a:solidFill>
-                <a:latin typeface="Arial"/>
+                  <a:srgbClr val="D2452C"/>
+                </a:solidFill>
+                <a:latin typeface="Trebuchet MS"/>
               </a:rPr>
               <a:t>IMAGE · F-IMG-70 · coming</a:t>
             </a:r>
@@ -11620,9 +11620,9 @@
             <a:r>
               <a:rPr sz="1800" b="1">
                 <a:solidFill>
-                  <a:srgbClr val="1F4D2B"/>
-                </a:solidFill>
-                <a:latin typeface="Georgia"/>
+                  <a:srgbClr val="1C1C1C"/>
+                </a:solidFill>
+                <a:latin typeface="Segoe Print"/>
               </a:rPr>
               <a:t>Picture quiz card 1</a:t>
             </a:r>
@@ -11659,9 +11659,9 @@
             <a:r>
               <a:rPr sz="1100" b="0">
                 <a:solidFill>
-                  <a:srgbClr val="20190F"/>
-                </a:solidFill>
-                <a:latin typeface="Arial"/>
+                  <a:srgbClr val="1C1C1C"/>
+                </a:solidFill>
+                <a:latin typeface="Trebuchet MS"/>
               </a:rPr>
               <a:t>Question (said aloud, not printed in the art): 'Where is the sun at midday in winter?' Art: three panels A/B/C: sun to the north of a house (shadow south) · sun to the south · sun straight overhead. Three equal panels with a large A, B and C typeset below each panel in the layout (not in the art).</a:t>
             </a:r>

--- a/courses/build/teach-the-teachers/T-D5.pptx
+++ b/courses/build/teach-the-teachers/T-D5.pptx
@@ -1298,7 +1298,7 @@
           </a:p>
           <a:p>
             <a:r>
-              <a:t>Clip T-ANI-23: public/course-animations/market-community/watch-04-farm-record.mp4</a:t>
+              <a:t>Clip T-ANI-23: public/course-media/teach-the-teachers/T-ANI-23.mp4</a:t>
             </a:r>
           </a:p>
         </p:txBody>
@@ -9354,49 +9354,27 @@
           </a:p>
         </p:txBody>
       </p:sp>
-      <p:pic>
-        <p:nvPicPr>
-          <p:cNvPr id="7" name="Picture 6" descr="watch-04-farm-record.jpg"/>
-          <p:cNvPicPr>
-            <a:picLocks noChangeAspect="1"/>
-          </p:cNvPicPr>
-          <p:nvPr/>
-        </p:nvPicPr>
-        <p:blipFill>
-          <a:blip r:embed="rId2"/>
-          <a:stretch>
-            <a:fillRect/>
-          </a:stretch>
-        </p:blipFill>
-        <p:spPr>
-          <a:xfrm>
-            <a:off x="5852160" y="2308860"/>
-            <a:ext cx="5852160" cy="3291840"/>
-          </a:xfrm>
-          <a:prstGeom prst="rect">
-            <a:avLst/>
-          </a:prstGeom>
-        </p:spPr>
-      </p:pic>
-      <p:sp>
-        <p:nvSpPr>
-          <p:cNvPr id="8" name="Rectangle 7"/>
+      <p:sp>
+        <p:nvSpPr>
+          <p:cNvPr id="7" name="Rectangle 6"/>
           <p:cNvSpPr/>
           <p:nvPr/>
         </p:nvSpPr>
         <p:spPr>
           <a:xfrm>
-            <a:off x="5852160" y="5806440"/>
-            <a:ext cx="5852160" cy="411480"/>
+            <a:off x="5852160" y="1691640"/>
+            <a:ext cx="5852160" cy="4526280"/>
           </a:xfrm>
           <a:prstGeom prst="rect">
             <a:avLst/>
           </a:prstGeom>
           <a:solidFill>
-            <a:srgbClr val="1C1C1C"/>
+            <a:srgbClr val="C9A77C"/>
           </a:solidFill>
-          <a:ln>
-            <a:noFill/>
+          <a:ln w="15875">
+            <a:solidFill>
+              <a:srgbClr val="2C6FB7"/>
+            </a:solidFill>
           </a:ln>
           <a:effectLst/>
         </p:spPr>
@@ -9424,14 +9402,53 @@
       </p:sp>
       <p:sp>
         <p:nvSpPr>
+          <p:cNvPr id="8" name="TextBox 7"/>
+          <p:cNvSpPr txBox="1"/>
+          <p:nvPr/>
+        </p:nvSpPr>
+        <p:spPr>
+          <a:xfrm>
+            <a:off x="6080760" y="1874520"/>
+            <a:ext cx="5394960" cy="365760"/>
+          </a:xfrm>
+          <a:prstGeom prst="rect">
+            <a:avLst/>
+          </a:prstGeom>
+          <a:noFill/>
+        </p:spPr>
+        <p:txBody>
+          <a:bodyPr wrap="square" anchor="t" lIns="45720" rIns="45720">
+            <a:spAutoFit/>
+          </a:bodyPr>
+          <a:lstStyle/>
+          <a:p>
+            <a:pPr algn="l">
+              <a:spcAft>
+                <a:spcPts val="800"/>
+              </a:spcAft>
+            </a:pPr>
+            <a:r>
+              <a:rPr sz="1200" b="1">
+                <a:solidFill>
+                  <a:srgbClr val="D2452C"/>
+                </a:solidFill>
+                <a:latin typeface="Trebuchet MS"/>
+              </a:rPr>
+              <a:t>ANIMATION · T-ANI-23 · coming</a:t>
+            </a:r>
+          </a:p>
+        </p:txBody>
+      </p:sp>
+      <p:sp>
+        <p:nvSpPr>
           <p:cNvPr id="9" name="TextBox 8"/>
           <p:cNvSpPr txBox="1"/>
           <p:nvPr/>
         </p:nvSpPr>
         <p:spPr>
           <a:xfrm>
-            <a:off x="5943600" y="5815584"/>
-            <a:ext cx="5669280" cy="384048"/>
+            <a:off x="6080760" y="2258568"/>
+            <a:ext cx="5394960" cy="457200"/>
           </a:xfrm>
           <a:prstGeom prst="rect">
             <a:avLst/>
@@ -9439,7 +9456,7 @@
           <a:noFill/>
         </p:spPr>
         <p:txBody>
-          <a:bodyPr wrap="square" anchor="ctr" lIns="45720" rIns="45720">
+          <a:bodyPr wrap="square" anchor="t" lIns="45720" rIns="45720">
             <a:spAutoFit/>
           </a:bodyPr>
           <a:lstStyle/>
@@ -9450,13 +9467,52 @@
               </a:spcAft>
             </a:pPr>
             <a:r>
+              <a:rPr sz="1800" b="1">
+                <a:solidFill>
+                  <a:srgbClr val="1C1C1C"/>
+                </a:solidFill>
+                <a:latin typeface="Segoe Print"/>
+              </a:rPr>
+              <a:t>The farm record</a:t>
+            </a:r>
+          </a:p>
+        </p:txBody>
+      </p:sp>
+      <p:sp>
+        <p:nvSpPr>
+          <p:cNvPr id="10" name="TextBox 9"/>
+          <p:cNvSpPr txBox="1"/>
+          <p:nvPr/>
+        </p:nvSpPr>
+        <p:spPr>
+          <a:xfrm>
+            <a:off x="6080760" y="2788920"/>
+            <a:ext cx="5394960" cy="3246120"/>
+          </a:xfrm>
+          <a:prstGeom prst="rect">
+            <a:avLst/>
+          </a:prstGeom>
+          <a:noFill/>
+        </p:spPr>
+        <p:txBody>
+          <a:bodyPr wrap="square" anchor="t" lIns="45720" rIns="45720">
+            <a:spAutoFit/>
+          </a:bodyPr>
+          <a:lstStyle/>
+          <a:p>
+            <a:pPr algn="l">
+              <a:spcAft>
+                <a:spcPts val="800"/>
+              </a:spcAft>
+            </a:pPr>
+            <a:r>
               <a:rPr sz="1100" b="0">
                 <a:solidFill>
-                  <a:srgbClr val="C9A77C"/>
+                  <a:srgbClr val="1C1C1C"/>
                 </a:solidFill>
                 <a:latin typeface="Trebuchet MS"/>
               </a:rPr>
-              <a:t>▶  Clip T-ANI-23 · play from the tablet: watch-04-farm-record.mp4</a:t>
+              <a:t>A hand makes tally marks in two columns of a simple exercise book beside a basket of harvested greens and a hanging scale; bunches move from the basket into three piles (eat, share, sell) as marks appear. Marks are simple strokes, never readable writing. (Replaces the withdrawn clip `market-community/watch-04-farm-record.mp4`.)</a:t>
             </a:r>
           </a:p>
         </p:txBody>
